--- a/docs/presentaciones/classes/clase-207-testing-de-modelos-invariance-behavioral-tests-presentacion.pptx
+++ b/docs/presentaciones/classes/clase-207-testing-de-modelos-invariance-behavioral-tests-presentacion.pptx
@@ -3272,7 +3272,7 @@
                 </a:solidFill>
                 <a:latin typeface="Segoe UI"/>
               </a:rPr>
-              <a:t>Parte: 4 — MLOps · Fuente: Ribeiro et al., Beyond Accuracy: Behavioral Testing of NLP Models with CheckList (ACL 2020, best paper) + Huyen cap. 9 + Deepchecks docs.  Duración estimada: 80 min.</a:t>
+              <a:t>Parte: 4 — MLOps · Fuente: Ribeiro et al., Beyond Accuracy: Behavioral Testing of NLP Models with CheckList (ACL 2020, best paper) + Huyen cap. 9 + Deepchecks docs.  Duración estimada: 80 min. · Nivel: Avanzado</a:t>
             </a:r>
           </a:p>
         </p:txBody>
@@ -3581,7 +3581,7 @@
                 </a:solidFill>
                 <a:latin typeface="Segoe UI"/>
               </a:rPr>
-              <a:t>Parte: 4 — MLOps · Fuente: Ribeiro et al., Beyond Accuracy: Behavioral Testing of NLP Models with CheckList (ACL 2020, best paper) + Huyen cap. 9 + Deepchecks docs.  Duración estimada: 80 min.</a:t>
+              <a:t>Parte: 4 — MLOps · Fuente: Ribeiro et al., Beyond Accuracy: Behavioral Testing of NLP Models with CheckList (ACL 2020, best paper) + Huyen cap. 9 + Deepchecks docs.  Duración estimada: 80 min. · Nivel: Avanzado</a:t>
             </a:r>
           </a:p>
         </p:txBody>
@@ -6519,7 +6519,7 @@
                 </a:solidFill>
                 <a:latin typeface="Segoe UI Semibold"/>
               </a:rPr>
-              <a:t>Clase 208 — Bases de datos relacionales: PostgreSQL para ML</a:t>
+              <a:t>Clase 208 — Pipelines ETL/ELT con Airflow</a:t>
             </a:r>
           </a:p>
         </p:txBody>
